--- a/index/designs/y8-l14/l1-living-room/l1-living-room.pptx
+++ b/index/designs/y8-l14/l1-living-room/l1-living-room.pptx
@@ -5811,8 +5811,8 @@
         </p:nvSpPr>
         <p:spPr>
           <a:xfrm>
-            <a:off x="507950" y="180975"/>
-            <a:ext cx="1264837" cy="171450"/>
+            <a:off x="507950" y="176213"/>
+            <a:ext cx="1371404" cy="180975"/>
           </a:xfrm>
           <a:prstGeom prst="rect">
             <a:avLst/>
@@ -5850,8 +5850,8 @@
         </p:nvSpPr>
         <p:spPr>
           <a:xfrm>
-            <a:off x="2033439" y="166688"/>
-            <a:ext cx="934661" cy="200025"/>
+            <a:off x="2137916" y="166688"/>
+            <a:ext cx="1049426" cy="200025"/>
           </a:xfrm>
           <a:prstGeom prst="rect">
             <a:avLst/>
@@ -5889,8 +5889,8 @@
         </p:nvSpPr>
         <p:spPr>
           <a:xfrm>
-            <a:off x="11244709" y="180975"/>
-            <a:ext cx="448127" cy="171450"/>
+            <a:off x="11208693" y="176213"/>
+            <a:ext cx="484864" cy="180975"/>
           </a:xfrm>
           <a:prstGeom prst="rect">
             <a:avLst/>
@@ -7507,7 +7507,7 @@
       </p:sp>
       <p:pic>
         <p:nvPicPr>
-          <p:cNvPr id="10" name="Image 0" descr="/var/folders/6c/210dcgxn4gz5sm71vld2cy1h0000gn/T/tmp.emPkXuZ1Lq/img/shafa.png">    </p:cNvPr>
+          <p:cNvPr id="10" name="Image 0" descr="/var/folders/6c/210dcgxn4gz5sm71vld2cy1h0000gn/T/tmp.owmCEDjpXl/img/shafa.png">    </p:cNvPr>
           <p:cNvPicPr>
             <a:picLocks noChangeAspect="1"/>
           </p:cNvPicPr>
@@ -7606,7 +7606,7 @@
       </p:sp>
       <p:pic>
         <p:nvPicPr>
-          <p:cNvPr id="13" name="Image 1" descr="/var/folders/6c/210dcgxn4gz5sm71vld2cy1h0000gn/T/tmp.emPkXuZ1Lq/img/chaji.png">    </p:cNvPr>
+          <p:cNvPr id="13" name="Image 1" descr="/var/folders/6c/210dcgxn4gz5sm71vld2cy1h0000gn/T/tmp.owmCEDjpXl/img/chaji.png">    </p:cNvPr>
           <p:cNvPicPr>
             <a:picLocks noChangeAspect="1"/>
           </p:cNvPicPr>
@@ -7705,7 +7705,7 @@
       </p:sp>
       <p:pic>
         <p:nvPicPr>
-          <p:cNvPr id="16" name="Image 2" descr="/var/folders/6c/210dcgxn4gz5sm71vld2cy1h0000gn/T/tmp.emPkXuZ1Lq/img/dianshigui.png">    </p:cNvPr>
+          <p:cNvPr id="16" name="Image 2" descr="/var/folders/6c/210dcgxn4gz5sm71vld2cy1h0000gn/T/tmp.owmCEDjpXl/img/dianshigui.png">    </p:cNvPr>
           <p:cNvPicPr>
             <a:picLocks noChangeAspect="1"/>
           </p:cNvPicPr>
@@ -8159,7 +8159,7 @@
       </p:sp>
       <p:pic>
         <p:nvPicPr>
-          <p:cNvPr id="9" name="Image 0" descr="/var/folders/6c/210dcgxn4gz5sm71vld2cy1h0000gn/T/tmp.emPkXuZ1Lq/img/keting.png">    </p:cNvPr>
+          <p:cNvPr id="9" name="Image 0" descr="/var/folders/6c/210dcgxn4gz5sm71vld2cy1h0000gn/T/tmp.owmCEDjpXl/img/keting.png">    </p:cNvPr>
           <p:cNvPicPr>
             <a:picLocks noChangeAspect="1"/>
           </p:cNvPicPr>
@@ -10048,8 +10048,8 @@
         </p:nvSpPr>
         <p:spPr>
           <a:xfrm>
-            <a:off x="507950" y="176213"/>
-            <a:ext cx="1468407" cy="180975"/>
+            <a:off x="507950" y="180975"/>
+            <a:ext cx="1325103" cy="171450"/>
           </a:xfrm>
           <a:prstGeom prst="rect">
             <a:avLst/>
@@ -10087,8 +10087,8 @@
         </p:nvSpPr>
         <p:spPr>
           <a:xfrm>
-            <a:off x="2233017" y="166688"/>
-            <a:ext cx="1046390" cy="200025"/>
+            <a:off x="2092523" y="166688"/>
+            <a:ext cx="967451" cy="200025"/>
           </a:xfrm>
           <a:prstGeom prst="rect">
             <a:avLst/>
@@ -10126,8 +10126,8 @@
         </p:nvSpPr>
         <p:spPr>
           <a:xfrm>
-            <a:off x="11266736" y="176213"/>
-            <a:ext cx="425660" cy="180975"/>
+            <a:off x="11322397" y="180975"/>
+            <a:ext cx="368885" cy="171450"/>
           </a:xfrm>
           <a:prstGeom prst="rect">
             <a:avLst/>
@@ -10195,7 +10195,7 @@
         </p:nvSpPr>
         <p:spPr>
           <a:xfrm>
-            <a:off x="609600" y="964406"/>
+            <a:off x="609600" y="940594"/>
             <a:ext cx="11192256" cy="200025"/>
           </a:xfrm>
           <a:prstGeom prst="rect">
@@ -10234,12 +10234,12 @@
         </p:nvSpPr>
         <p:spPr>
           <a:xfrm>
-            <a:off x="609600" y="1164431"/>
-            <a:ext cx="10972800" cy="823913"/>
+            <a:off x="609600" y="1140619"/>
+            <a:ext cx="10972800" cy="833438"/>
           </a:xfrm>
           <a:prstGeom prst="roundRect">
             <a:avLst>
-              <a:gd name="adj" fmla="val 7707"/>
+              <a:gd name="adj" fmla="val 7619"/>
             </a:avLst>
           </a:prstGeom>
           <a:solidFill>
@@ -10270,7 +10270,7 @@
         </p:nvSpPr>
         <p:spPr>
           <a:xfrm>
-            <a:off x="796826" y="1275457"/>
+            <a:off x="796826" y="1251645"/>
             <a:ext cx="246075" cy="289471"/>
           </a:xfrm>
           <a:prstGeom prst="rect">
@@ -10312,8 +10312,8 @@
         </p:nvSpPr>
         <p:spPr>
           <a:xfrm>
-            <a:off x="1203127" y="1275457"/>
-            <a:ext cx="1422410" cy="284411"/>
+            <a:off x="1203127" y="1251645"/>
+            <a:ext cx="1406015" cy="284411"/>
           </a:xfrm>
           <a:prstGeom prst="rect">
             <a:avLst/>
@@ -10365,8 +10365,8 @@
         </p:nvSpPr>
         <p:spPr>
           <a:xfrm>
-            <a:off x="1203127" y="1610618"/>
-            <a:ext cx="1422410" cy="266700"/>
+            <a:off x="1203127" y="1586805"/>
+            <a:ext cx="1406015" cy="276225"/>
           </a:xfrm>
           <a:prstGeom prst="rect">
             <a:avLst/>
@@ -10407,12 +10407,12 @@
         </p:nvSpPr>
         <p:spPr>
           <a:xfrm>
-            <a:off x="609600" y="2064544"/>
-            <a:ext cx="10972800" cy="823913"/>
+            <a:off x="609600" y="2050256"/>
+            <a:ext cx="10972800" cy="833438"/>
           </a:xfrm>
           <a:prstGeom prst="roundRect">
             <a:avLst>
-              <a:gd name="adj" fmla="val 7707"/>
+              <a:gd name="adj" fmla="val 7619"/>
             </a:avLst>
           </a:prstGeom>
           <a:solidFill>
@@ -10443,7 +10443,7 @@
         </p:nvSpPr>
         <p:spPr>
           <a:xfrm>
-            <a:off x="796826" y="2175570"/>
+            <a:off x="796826" y="2161282"/>
             <a:ext cx="246075" cy="289471"/>
           </a:xfrm>
           <a:prstGeom prst="rect">
@@ -10485,8 +10485,8 @@
         </p:nvSpPr>
         <p:spPr>
           <a:xfrm>
-            <a:off x="1203127" y="2175570"/>
-            <a:ext cx="1317665" cy="284411"/>
+            <a:off x="1203127" y="2161282"/>
+            <a:ext cx="1307646" cy="284411"/>
           </a:xfrm>
           <a:prstGeom prst="rect">
             <a:avLst/>
@@ -10538,8 +10538,8 @@
         </p:nvSpPr>
         <p:spPr>
           <a:xfrm>
-            <a:off x="1203127" y="2510730"/>
-            <a:ext cx="1317665" cy="266700"/>
+            <a:off x="1203127" y="2496443"/>
+            <a:ext cx="1307646" cy="276225"/>
           </a:xfrm>
           <a:prstGeom prst="rect">
             <a:avLst/>
@@ -10580,12 +10580,12 @@
         </p:nvSpPr>
         <p:spPr>
           <a:xfrm>
-            <a:off x="609600" y="2964656"/>
-            <a:ext cx="10972800" cy="823913"/>
+            <a:off x="609600" y="2959894"/>
+            <a:ext cx="10972800" cy="833438"/>
           </a:xfrm>
           <a:prstGeom prst="roundRect">
             <a:avLst>
-              <a:gd name="adj" fmla="val 7707"/>
+              <a:gd name="adj" fmla="val 7619"/>
             </a:avLst>
           </a:prstGeom>
           <a:solidFill>
@@ -10616,7 +10616,7 @@
         </p:nvSpPr>
         <p:spPr>
           <a:xfrm>
-            <a:off x="796826" y="3075682"/>
+            <a:off x="796826" y="3070920"/>
             <a:ext cx="246075" cy="289471"/>
           </a:xfrm>
           <a:prstGeom prst="rect">
@@ -10658,8 +10658,8 @@
         </p:nvSpPr>
         <p:spPr>
           <a:xfrm>
-            <a:off x="1203127" y="3075682"/>
-            <a:ext cx="2197828" cy="284411"/>
+            <a:off x="1203127" y="3070920"/>
+            <a:ext cx="2190845" cy="284411"/>
           </a:xfrm>
           <a:prstGeom prst="rect">
             <a:avLst/>
@@ -10711,8 +10711,8 @@
         </p:nvSpPr>
         <p:spPr>
           <a:xfrm>
-            <a:off x="1203127" y="3410843"/>
-            <a:ext cx="2197828" cy="266700"/>
+            <a:off x="1203127" y="3406080"/>
+            <a:ext cx="2190845" cy="276225"/>
           </a:xfrm>
           <a:prstGeom prst="rect">
             <a:avLst/>
@@ -10753,12 +10753,12 @@
         </p:nvSpPr>
         <p:spPr>
           <a:xfrm>
-            <a:off x="609600" y="3864769"/>
-            <a:ext cx="10972800" cy="823913"/>
+            <a:off x="609600" y="3869531"/>
+            <a:ext cx="10972800" cy="833438"/>
           </a:xfrm>
           <a:prstGeom prst="roundRect">
             <a:avLst>
-              <a:gd name="adj" fmla="val 7707"/>
+              <a:gd name="adj" fmla="val 7619"/>
             </a:avLst>
           </a:prstGeom>
           <a:solidFill>
@@ -10789,7 +10789,7 @@
         </p:nvSpPr>
         <p:spPr>
           <a:xfrm>
-            <a:off x="796826" y="3975795"/>
+            <a:off x="796826" y="3980557"/>
             <a:ext cx="246075" cy="289471"/>
           </a:xfrm>
           <a:prstGeom prst="rect">
@@ -10831,8 +10831,8 @@
         </p:nvSpPr>
         <p:spPr>
           <a:xfrm>
-            <a:off x="1203127" y="3975795"/>
-            <a:ext cx="1487231" cy="284411"/>
+            <a:off x="1203127" y="3980557"/>
+            <a:ext cx="1439412" cy="284411"/>
           </a:xfrm>
           <a:prstGeom prst="rect">
             <a:avLst/>
@@ -10884,8 +10884,8 @@
         </p:nvSpPr>
         <p:spPr>
           <a:xfrm>
-            <a:off x="1203127" y="4310955"/>
-            <a:ext cx="1487231" cy="266700"/>
+            <a:off x="1203127" y="4315718"/>
+            <a:ext cx="1439412" cy="276225"/>
           </a:xfrm>
           <a:prstGeom prst="rect">
             <a:avLst/>
@@ -10926,12 +10926,12 @@
         </p:nvSpPr>
         <p:spPr>
           <a:xfrm>
-            <a:off x="609600" y="4764881"/>
-            <a:ext cx="10972800" cy="823913"/>
+            <a:off x="609600" y="4779169"/>
+            <a:ext cx="10972800" cy="833438"/>
           </a:xfrm>
           <a:prstGeom prst="roundRect">
             <a:avLst>
-              <a:gd name="adj" fmla="val 7707"/>
+              <a:gd name="adj" fmla="val 7619"/>
             </a:avLst>
           </a:prstGeom>
           <a:solidFill>
@@ -10962,7 +10962,7 @@
         </p:nvSpPr>
         <p:spPr>
           <a:xfrm>
-            <a:off x="796826" y="4875907"/>
+            <a:off x="796826" y="4890195"/>
             <a:ext cx="246075" cy="289471"/>
           </a:xfrm>
           <a:prstGeom prst="rect">
@@ -11004,8 +11004,8 @@
         </p:nvSpPr>
         <p:spPr>
           <a:xfrm>
-            <a:off x="1203127" y="4875907"/>
-            <a:ext cx="2584930" cy="284411"/>
+            <a:off x="1203127" y="4890195"/>
+            <a:ext cx="2472595" cy="284411"/>
           </a:xfrm>
           <a:prstGeom prst="rect">
             <a:avLst/>
@@ -11057,8 +11057,8 @@
         </p:nvSpPr>
         <p:spPr>
           <a:xfrm>
-            <a:off x="1203127" y="5211068"/>
-            <a:ext cx="2584930" cy="266700"/>
+            <a:off x="1203127" y="5225355"/>
+            <a:ext cx="2472595" cy="276225"/>
           </a:xfrm>
           <a:prstGeom prst="rect">
             <a:avLst/>
@@ -11099,7 +11099,7 @@
         </p:nvSpPr>
         <p:spPr>
           <a:xfrm>
-            <a:off x="609600" y="5690295"/>
+            <a:off x="609600" y="5714107"/>
             <a:ext cx="11192256" cy="228600"/>
           </a:xfrm>
           <a:prstGeom prst="rect">
@@ -13633,8 +13633,8 @@
         </p:nvSpPr>
         <p:spPr>
           <a:xfrm>
-            <a:off x="507950" y="180975"/>
-            <a:ext cx="2386370" cy="171450"/>
+            <a:off x="507950" y="176213"/>
+            <a:ext cx="2644893" cy="180975"/>
           </a:xfrm>
           <a:prstGeom prst="rect">
             <a:avLst/>
@@ -13672,8 +13672,8 @@
         </p:nvSpPr>
         <p:spPr>
           <a:xfrm>
-            <a:off x="3132981" y="166688"/>
-            <a:ext cx="1198650" cy="200025"/>
+            <a:off x="3386435" y="166688"/>
+            <a:ext cx="1359563" cy="200025"/>
           </a:xfrm>
           <a:prstGeom prst="rect">
             <a:avLst/>
@@ -13711,8 +13711,8 @@
         </p:nvSpPr>
         <p:spPr>
           <a:xfrm>
-            <a:off x="11244709" y="180975"/>
-            <a:ext cx="448127" cy="171450"/>
+            <a:off x="11183838" y="176213"/>
+            <a:ext cx="510216" cy="180975"/>
           </a:xfrm>
           <a:prstGeom prst="rect">
             <a:avLst/>
@@ -13780,7 +13780,7 @@
         </p:nvSpPr>
         <p:spPr>
           <a:xfrm>
-            <a:off x="609600" y="1064865"/>
+            <a:off x="609600" y="1083915"/>
             <a:ext cx="11192256" cy="200025"/>
           </a:xfrm>
           <a:prstGeom prst="rect">
@@ -13819,12 +13819,12 @@
         </p:nvSpPr>
         <p:spPr>
           <a:xfrm>
-            <a:off x="609600" y="1264890"/>
-            <a:ext cx="10972800" cy="935236"/>
+            <a:off x="609600" y="1283940"/>
+            <a:ext cx="10972800" cy="925711"/>
           </a:xfrm>
           <a:prstGeom prst="roundRect">
             <a:avLst>
-              <a:gd name="adj" fmla="val 6790"/>
+              <a:gd name="adj" fmla="val 6860"/>
             </a:avLst>
           </a:prstGeom>
           <a:solidFill>
@@ -13855,7 +13855,7 @@
         </p:nvSpPr>
         <p:spPr>
           <a:xfrm>
-            <a:off x="822275" y="1426815"/>
+            <a:off x="822275" y="1445865"/>
             <a:ext cx="297841" cy="350490"/>
           </a:xfrm>
           <a:prstGeom prst="rect">
@@ -13897,8 +13897,8 @@
         </p:nvSpPr>
         <p:spPr>
           <a:xfrm>
-            <a:off x="1279327" y="1426815"/>
-            <a:ext cx="5400148" cy="284411"/>
+            <a:off x="1279327" y="1445865"/>
+            <a:ext cx="6444716" cy="284411"/>
           </a:xfrm>
           <a:prstGeom prst="rect">
             <a:avLst/>
@@ -13939,8 +13939,8 @@
         </p:nvSpPr>
         <p:spPr>
           <a:xfrm>
-            <a:off x="1279327" y="1761976"/>
-            <a:ext cx="5400148" cy="276225"/>
+            <a:off x="1279327" y="1781026"/>
+            <a:ext cx="6444716" cy="266700"/>
           </a:xfrm>
           <a:prstGeom prst="rect">
             <a:avLst/>
@@ -13981,12 +13981,12 @@
         </p:nvSpPr>
         <p:spPr>
           <a:xfrm>
-            <a:off x="609600" y="2352526"/>
-            <a:ext cx="10972800" cy="935236"/>
+            <a:off x="609600" y="2362051"/>
+            <a:ext cx="10972800" cy="925711"/>
           </a:xfrm>
           <a:prstGeom prst="roundRect">
             <a:avLst>
-              <a:gd name="adj" fmla="val 6790"/>
+              <a:gd name="adj" fmla="val 6860"/>
             </a:avLst>
           </a:prstGeom>
           <a:solidFill>
@@ -14017,7 +14017,7 @@
         </p:nvSpPr>
         <p:spPr>
           <a:xfrm>
-            <a:off x="822275" y="2514451"/>
+            <a:off x="822275" y="2523976"/>
             <a:ext cx="297841" cy="350490"/>
           </a:xfrm>
           <a:prstGeom prst="rect">
@@ -14059,8 +14059,8 @@
         </p:nvSpPr>
         <p:spPr>
           <a:xfrm>
-            <a:off x="1279327" y="2514451"/>
-            <a:ext cx="4144723" cy="284411"/>
+            <a:off x="1279327" y="2523976"/>
+            <a:ext cx="4206812" cy="284411"/>
           </a:xfrm>
           <a:prstGeom prst="rect">
             <a:avLst/>
@@ -14101,8 +14101,8 @@
         </p:nvSpPr>
         <p:spPr>
           <a:xfrm>
-            <a:off x="1279327" y="2849612"/>
-            <a:ext cx="4144723" cy="276225"/>
+            <a:off x="1279327" y="2859137"/>
+            <a:ext cx="4206812" cy="266700"/>
           </a:xfrm>
           <a:prstGeom prst="rect">
             <a:avLst/>
@@ -14144,11 +14144,11 @@
         <p:spPr>
           <a:xfrm>
             <a:off x="609600" y="3440162"/>
-            <a:ext cx="10972800" cy="935236"/>
+            <a:ext cx="10972800" cy="925711"/>
           </a:xfrm>
           <a:prstGeom prst="roundRect">
             <a:avLst>
-              <a:gd name="adj" fmla="val 6790"/>
+              <a:gd name="adj" fmla="val 6860"/>
             </a:avLst>
           </a:prstGeom>
           <a:solidFill>
@@ -14222,7 +14222,7 @@
         <p:spPr>
           <a:xfrm>
             <a:off x="1279327" y="3602087"/>
-            <a:ext cx="5180942" cy="284411"/>
+            <a:ext cx="5258666" cy="284411"/>
           </a:xfrm>
           <a:prstGeom prst="rect">
             <a:avLst/>
@@ -14275,7 +14275,7 @@
         <p:spPr>
           <a:xfrm>
             <a:off x="1279327" y="3937248"/>
-            <a:ext cx="5180942" cy="276225"/>
+            <a:ext cx="5258666" cy="266700"/>
           </a:xfrm>
           <a:prstGeom prst="rect">
             <a:avLst/>
@@ -14316,12 +14316,12 @@
         </p:nvSpPr>
         <p:spPr>
           <a:xfrm>
-            <a:off x="609600" y="4527798"/>
-            <a:ext cx="10972800" cy="935236"/>
+            <a:off x="609600" y="4518273"/>
+            <a:ext cx="10972800" cy="925711"/>
           </a:xfrm>
           <a:prstGeom prst="roundRect">
             <a:avLst>
-              <a:gd name="adj" fmla="val 6790"/>
+              <a:gd name="adj" fmla="val 6860"/>
             </a:avLst>
           </a:prstGeom>
           <a:solidFill>
@@ -14352,7 +14352,7 @@
         </p:nvSpPr>
         <p:spPr>
           <a:xfrm>
-            <a:off x="822275" y="4689723"/>
+            <a:off x="822275" y="4680198"/>
             <a:ext cx="297841" cy="350490"/>
           </a:xfrm>
           <a:prstGeom prst="rect">
@@ -14394,8 +14394,8 @@
         </p:nvSpPr>
         <p:spPr>
           <a:xfrm>
-            <a:off x="1279327" y="4689723"/>
-            <a:ext cx="4144875" cy="284411"/>
+            <a:off x="1279327" y="4680198"/>
+            <a:ext cx="4206963" cy="284411"/>
           </a:xfrm>
           <a:prstGeom prst="rect">
             <a:avLst/>
@@ -14447,8 +14447,8 @@
         </p:nvSpPr>
         <p:spPr>
           <a:xfrm>
-            <a:off x="1279327" y="5024884"/>
-            <a:ext cx="4144875" cy="276225"/>
+            <a:off x="1279327" y="5015359"/>
+            <a:ext cx="4206963" cy="266700"/>
           </a:xfrm>
           <a:prstGeom prst="rect">
             <a:avLst/>
@@ -14489,7 +14489,7 @@
         </p:nvSpPr>
         <p:spPr>
           <a:xfrm>
-            <a:off x="609600" y="5589984"/>
+            <a:off x="609600" y="5570934"/>
             <a:ext cx="11192256" cy="228600"/>
           </a:xfrm>
           <a:prstGeom prst="rect">
@@ -16990,7 +16990,7 @@
       </p:sp>
       <p:pic>
         <p:nvPicPr>
-          <p:cNvPr id="10" name="Image 0" descr="/var/folders/6c/210dcgxn4gz5sm71vld2cy1h0000gn/T/tmp.emPkXuZ1Lq/img/shafa.png">    </p:cNvPr>
+          <p:cNvPr id="10" name="Image 0" descr="/var/folders/6c/210dcgxn4gz5sm71vld2cy1h0000gn/T/tmp.owmCEDjpXl/img/shafa.png">    </p:cNvPr>
           <p:cNvPicPr>
             <a:picLocks noChangeAspect="1"/>
           </p:cNvPicPr>
@@ -17170,7 +17170,7 @@
       </p:sp>
       <p:pic>
         <p:nvPicPr>
-          <p:cNvPr id="15" name="Image 1" descr="/var/folders/6c/210dcgxn4gz5sm71vld2cy1h0000gn/T/tmp.emPkXuZ1Lq/img/chaji.png">    </p:cNvPr>
+          <p:cNvPr id="15" name="Image 1" descr="/var/folders/6c/210dcgxn4gz5sm71vld2cy1h0000gn/T/tmp.owmCEDjpXl/img/chaji.png">    </p:cNvPr>
           <p:cNvPicPr>
             <a:picLocks noChangeAspect="1"/>
           </p:cNvPicPr>
@@ -18898,7 +18898,7 @@
       </p:sp>
       <p:pic>
         <p:nvPicPr>
-          <p:cNvPr id="10" name="Image 0" descr="/var/folders/6c/210dcgxn4gz5sm71vld2cy1h0000gn/T/tmp.emPkXuZ1Lq/img/dianshigui.png">    </p:cNvPr>
+          <p:cNvPr id="10" name="Image 0" descr="/var/folders/6c/210dcgxn4gz5sm71vld2cy1h0000gn/T/tmp.owmCEDjpXl/img/dianshigui.png">    </p:cNvPr>
           <p:cNvPicPr>
             <a:picLocks noChangeAspect="1"/>
           </p:cNvPicPr>
@@ -19078,7 +19078,7 @@
       </p:sp>
       <p:pic>
         <p:nvPicPr>
-          <p:cNvPr id="15" name="Image 1" descr="/var/folders/6c/210dcgxn4gz5sm71vld2cy1h0000gn/T/tmp.emPkXuZ1Lq/img/zhang.png">    </p:cNvPr>
+          <p:cNvPr id="15" name="Image 1" descr="/var/folders/6c/210dcgxn4gz5sm71vld2cy1h0000gn/T/tmp.owmCEDjpXl/img/zhang.png">    </p:cNvPr>
           <p:cNvPicPr>
             <a:picLocks noChangeAspect="1"/>
           </p:cNvPicPr>
